--- a/Docs/MyBatis-plus.pptx
+++ b/Docs/MyBatis-plus.pptx
@@ -252,7 +252,7 @@
           <a:p>
             <a:fld id="{393B0715-2E07-4B30-82A4-29BE9219FCBD}" type="datetimeFigureOut">
               <a:rPr lang="zh-TW" altLang="en-US" smtClean="0"/>
-              <a:t>2026/6/3</a:t>
+              <a:t>2026/6/4</a:t>
             </a:fld>
             <a:endParaRPr lang="zh-TW" altLang="en-US"/>
           </a:p>
@@ -830,7 +830,7 @@
           <a:p>
             <a:fld id="{0C4C5BAE-20C2-4C6C-8BB7-EC9F33B0AF1D}" type="datetime1">
               <a:rPr lang="en-US" altLang="zh-TW" smtClean="0"/>
-              <a:t>6/3/2026</a:t>
+              <a:t>6/4/2026</a:t>
             </a:fld>
             <a:endParaRPr lang="en-US"/>
           </a:p>
@@ -1089,7 +1089,7 @@
           <a:p>
             <a:fld id="{67CC06D4-EECC-48A2-AF3F-9A59457EBDA4}" type="datetime1">
               <a:rPr lang="zh-TW" altLang="en-US" smtClean="0"/>
-              <a:t>2026/6/3</a:t>
+              <a:t>2026/6/4</a:t>
             </a:fld>
             <a:endParaRPr lang="zh-TW" altLang="en-US"/>
           </a:p>
@@ -1292,7 +1292,7 @@
           <a:p>
             <a:fld id="{A284A9CC-476D-4542-A265-A60408C0B38B}" type="datetime1">
               <a:rPr lang="zh-TW" altLang="en-US" smtClean="0"/>
-              <a:t>2026/6/3</a:t>
+              <a:t>2026/6/4</a:t>
             </a:fld>
             <a:endParaRPr lang="zh-TW" altLang="en-US"/>
           </a:p>
@@ -2108,7 +2108,7 @@
           <a:p>
             <a:fld id="{916B6C9C-812A-4C2F-BBAA-292E88821814}" type="datetime1">
               <a:rPr lang="zh-TW" altLang="en-US" smtClean="0"/>
-              <a:t>2026/6/3</a:t>
+              <a:t>2026/6/4</a:t>
             </a:fld>
             <a:endParaRPr lang="zh-TW" altLang="en-US"/>
           </a:p>
@@ -2508,7 +2508,7 @@
           <a:p>
             <a:fld id="{16691EA5-A7B5-4A3E-A49E-5A8210A61ECA}" type="datetime1">
               <a:rPr lang="zh-TW" altLang="en-US" smtClean="0"/>
-              <a:t>2026/6/3</a:t>
+              <a:t>2026/6/4</a:t>
             </a:fld>
             <a:endParaRPr lang="zh-TW" altLang="en-US"/>
           </a:p>
@@ -2654,7 +2654,7 @@
           <a:p>
             <a:fld id="{6F761969-3F0E-4945-9991-D6250D7048A7}" type="datetime1">
               <a:rPr lang="zh-TW" altLang="en-US" smtClean="0"/>
-              <a:t>2026/6/3</a:t>
+              <a:t>2026/6/4</a:t>
             </a:fld>
             <a:endParaRPr lang="zh-TW" altLang="en-US"/>
           </a:p>
@@ -2800,7 +2800,7 @@
           <a:p>
             <a:fld id="{CAAEEA88-AD01-49FD-B830-8831011DC877}" type="datetime1">
               <a:rPr lang="zh-TW" altLang="en-US" smtClean="0"/>
-              <a:t>2026/6/3</a:t>
+              <a:t>2026/6/4</a:t>
             </a:fld>
             <a:endParaRPr lang="zh-TW" altLang="en-US"/>
           </a:p>
@@ -3348,7 +3348,7 @@
           <a:p>
             <a:fld id="{87174770-FC09-4EA3-B56C-15A0D691CABC}" type="datetime1">
               <a:rPr lang="zh-TW" altLang="en-US" smtClean="0"/>
-              <a:t>2026/6/3</a:t>
+              <a:t>2026/6/4</a:t>
             </a:fld>
             <a:endParaRPr lang="zh-TW" altLang="en-US"/>
           </a:p>
@@ -3628,7 +3628,7 @@
           <a:p>
             <a:fld id="{63804746-04D4-457F-ACCF-0A8A7BAEE87D}" type="datetime1">
               <a:rPr lang="zh-TW" altLang="en-US" smtClean="0"/>
-              <a:t>2026/6/3</a:t>
+              <a:t>2026/6/4</a:t>
             </a:fld>
             <a:endParaRPr lang="zh-TW" altLang="en-US"/>
           </a:p>
@@ -3826,7 +3826,7 @@
           <a:p>
             <a:fld id="{0DC30BCA-8991-4389-9DAD-37DCE683428C}" type="datetime1">
               <a:rPr lang="zh-TW" altLang="en-US" smtClean="0"/>
-              <a:t>2026/6/3</a:t>
+              <a:t>2026/6/4</a:t>
             </a:fld>
             <a:endParaRPr lang="en-US" dirty="0"/>
           </a:p>
@@ -4873,6 +4873,13 @@
       </p:transition>
     </mc:Fallback>
   </mc:AlternateContent>
+  <p:timing>
+    <p:tnLst>
+      <p:par>
+        <p:cTn id="1" dur="indefinite" restart="never" nodeType="tmRoot"/>
+      </p:par>
+    </p:tnLst>
+  </p:timing>
 </p:sld>
 </file>
 
@@ -4965,6 +4972,13 @@
       </p:transition>
     </mc:Fallback>
   </mc:AlternateContent>
+  <p:timing>
+    <p:tnLst>
+      <p:par>
+        <p:cTn id="1" dur="indefinite" restart="never" nodeType="tmRoot"/>
+      </p:par>
+    </p:tnLst>
+  </p:timing>
 </p:sld>
 </file>
 
@@ -5100,6 +5114,13 @@
       </p:transition>
     </mc:Fallback>
   </mc:AlternateContent>
+  <p:timing>
+    <p:tnLst>
+      <p:par>
+        <p:cTn id="1" dur="indefinite" restart="never" nodeType="tmRoot"/>
+      </p:par>
+    </p:tnLst>
+  </p:timing>
 </p:sld>
 </file>
 
@@ -5237,6 +5258,13 @@
       </p:transition>
     </mc:Fallback>
   </mc:AlternateContent>
+  <p:timing>
+    <p:tnLst>
+      <p:par>
+        <p:cTn id="1" dur="indefinite" restart="never" nodeType="tmRoot"/>
+      </p:par>
+    </p:tnLst>
+  </p:timing>
 </p:sld>
 </file>
 
@@ -5533,6 +5561,13 @@
       </p:transition>
     </mc:Fallback>
   </mc:AlternateContent>
+  <p:timing>
+    <p:tnLst>
+      <p:par>
+        <p:cTn id="1" dur="indefinite" restart="never" nodeType="tmRoot"/>
+      </p:par>
+    </p:tnLst>
+  </p:timing>
 </p:sld>
 </file>
 
@@ -5762,6 +5797,13 @@
       </p:transition>
     </mc:Fallback>
   </mc:AlternateContent>
+  <p:timing>
+    <p:tnLst>
+      <p:par>
+        <p:cTn id="1" dur="indefinite" restart="never" nodeType="tmRoot"/>
+      </p:par>
+    </p:tnLst>
+  </p:timing>
 </p:sld>
 </file>
 
@@ -6096,6 +6138,13 @@
       </p:transition>
     </mc:Fallback>
   </mc:AlternateContent>
+  <p:timing>
+    <p:tnLst>
+      <p:par>
+        <p:cTn id="1" dur="indefinite" restart="never" nodeType="tmRoot"/>
+      </p:par>
+    </p:tnLst>
+  </p:timing>
 </p:sld>
 </file>
 
@@ -6464,6 +6513,13 @@
       </p:transition>
     </mc:Fallback>
   </mc:AlternateContent>
+  <p:timing>
+    <p:tnLst>
+      <p:par>
+        <p:cTn id="1" dur="indefinite" restart="never" nodeType="tmRoot"/>
+      </p:par>
+    </p:tnLst>
+  </p:timing>
 </p:sld>
 </file>
 
@@ -6556,6 +6612,13 @@
       </p:transition>
     </mc:Fallback>
   </mc:AlternateContent>
+  <p:timing>
+    <p:tnLst>
+      <p:par>
+        <p:cTn id="1" dur="indefinite" restart="never" nodeType="tmRoot"/>
+      </p:par>
+    </p:tnLst>
+  </p:timing>
 </p:sld>
 </file>
 
@@ -6734,6 +6797,13 @@
       </p:transition>
     </mc:Fallback>
   </mc:AlternateContent>
+  <p:timing>
+    <p:tnLst>
+      <p:par>
+        <p:cTn id="1" dur="indefinite" restart="never" nodeType="tmRoot"/>
+      </p:par>
+    </p:tnLst>
+  </p:timing>
 </p:sld>
 </file>
 
@@ -7045,6 +7115,13 @@
       </p:transition>
     </mc:Fallback>
   </mc:AlternateContent>
+  <p:timing>
+    <p:tnLst>
+      <p:par>
+        <p:cTn id="1" dur="indefinite" restart="never" nodeType="tmRoot"/>
+      </p:par>
+    </p:tnLst>
+  </p:timing>
 </p:sld>
 </file>
 
@@ -12398,7 +12475,6 @@
               <a:rPr lang="zh-TW" altLang="en-US" dirty="0"/>
               <a:t>。</a:t>
             </a:r>
-            <a:endParaRPr lang="zh-TW" altLang="en-US" dirty="0"/>
           </a:p>
         </p:txBody>
       </p:sp>
@@ -12859,7 +12935,6 @@
               <a:rPr lang="zh-TW" altLang="en-US" dirty="0"/>
               <a:t>。</a:t>
             </a:r>
-            <a:endParaRPr lang="zh-TW" altLang="en-US" dirty="0"/>
           </a:p>
         </p:txBody>
       </p:sp>
@@ -14134,7 +14209,6 @@
               <a:rPr lang="zh-TW" altLang="en-US" dirty="0"/>
               <a:t>使用。</a:t>
             </a:r>
-            <a:endParaRPr lang="zh-TW" altLang="en-US" dirty="0"/>
           </a:p>
         </p:txBody>
       </p:sp>
@@ -14242,7 +14316,6 @@
               <a:rPr lang="zh-TW" altLang="en-US" dirty="0"/>
               <a:t>，只會進入符合條件的第一個</a:t>
             </a:r>
-            <a:endParaRPr lang="zh-TW" altLang="en-US" dirty="0"/>
           </a:p>
         </p:txBody>
       </p:sp>
@@ -14598,15 +14671,11 @@
           <a:p>
             <a:r>
               <a:rPr lang="en-US" altLang="zh-TW" dirty="0" smtClean="0"/>
-              <a:t>&lt;select&gt;</a:t>
-            </a:r>
-            <a:endParaRPr lang="en-US" altLang="zh-TW" dirty="0"/>
-          </a:p>
-          <a:p>
-            <a:pPr lvl="1"/>
-            <a:r>
-              <a:rPr lang="en-US" altLang="zh-TW" dirty="0"/>
-              <a:t>&lt;sql id="Base_Column_List</a:t>
+              <a:t>&lt;</a:t>
+            </a:r>
+            <a:r>
+              <a:rPr lang="en-US" altLang="zh-TW" dirty="0"/>
+              <a:t>sql id="Base_Column_List</a:t>
             </a:r>
             <a:r>
               <a:rPr lang="en-US" altLang="zh-TW" dirty="0" smtClean="0"/>
@@ -14614,7 +14683,7 @@
             </a:r>
           </a:p>
           <a:p>
-            <a:pPr lvl="2"/>
+            <a:pPr lvl="1"/>
             <a:r>
               <a:rPr lang="en-US" altLang="zh-TW" dirty="0" smtClean="0"/>
               <a:t>id</a:t>
@@ -14629,7 +14698,6 @@
             </a:r>
           </a:p>
           <a:p>
-            <a:pPr lvl="1"/>
             <a:r>
               <a:rPr lang="en-US" altLang="zh-TW" dirty="0" smtClean="0"/>
               <a:t>&lt;/</a:t>
@@ -14644,6 +14712,17 @@
             </a:r>
           </a:p>
           <a:p>
+            <a:r>
+              <a:rPr lang="en-US" altLang="zh-TW" dirty="0"/>
+              <a:t>&lt;select</a:t>
+            </a:r>
+            <a:r>
+              <a:rPr lang="en-US" altLang="zh-TW" dirty="0" smtClean="0"/>
+              <a:t>&gt;</a:t>
+            </a:r>
+            <a:endParaRPr lang="en-US" altLang="zh-TW" dirty="0" smtClean="0"/>
+          </a:p>
+          <a:p>
             <a:pPr lvl="1"/>
             <a:r>
               <a:rPr lang="en-US" altLang="zh-TW" dirty="0" smtClean="0"/>
@@ -14694,7 +14773,6 @@
               <a:rPr lang="zh-TW" altLang="en-US" dirty="0"/>
               <a:t>實用進階技巧</a:t>
             </a:r>
-            <a:endParaRPr lang="zh-TW" altLang="en-US" dirty="0"/>
           </a:p>
         </p:txBody>
       </p:sp>
@@ -15349,6 +15427,13 @@
       </p:transition>
     </mc:Fallback>
   </mc:AlternateContent>
+  <p:timing>
+    <p:tnLst>
+      <p:par>
+        <p:cTn id="1" dur="indefinite" restart="never" nodeType="tmRoot"/>
+      </p:par>
+    </p:tnLst>
+  </p:timing>
 </p:sld>
 </file>
 
